--- a/decks/combined-bonding/combined-bonding_ch5_giant-covalent.pptx
+++ b/decks/combined-bonding/combined-bonding_ch5_giant-covalent.pptx
@@ -127,30 +127,30 @@
   <p:extLst>
     <p:ext uri="{521415D9-36F7-43E2-AB2F-B90AF26B5E84}">
       <p14:sectionLst xmlns:p14="http://schemas.microsoft.com/office/powerpoint/2010/main">
-        <p14:section name="Opening" id="{03c8e9d2-023f-f637-4e13-f138dd99f46d}">
+        <p14:section name="Opening" id="{98a2a0d4-74ac-9606-6683-18ea76794c1e}">
           <p14:sldIdLst>
             <p14:sldId id="256"/>
           </p14:sldIdLst>
         </p14:section>
-        <p14:section name="Gate" id="{a93964fd-6583-7b83-cad1-727cf5370096}">
+        <p14:section name="Gate" id="{76c87dab-a963-bd0b-88f9-6405cefabd4c}">
           <p14:sldIdLst>
             <p14:sldId id="257"/>
             <p14:sldId id="258"/>
           </p14:sldIdLst>
         </p14:section>
-        <p14:section name="Pre-teach" id="{050c6cdc-4f90-dbd6-3e1b-a3d965ace45b}">
+        <p14:section name="Pre-teach" id="{c9c30e26-6db2-fe86-8626-b3f0eb18b70d}">
           <p14:sldIdLst>
             <p14:sldId id="259"/>
             <p14:sldId id="260"/>
           </p14:sldIdLst>
         </p14:section>
-        <p14:section name="Read-along" id="{2d51b1a3-b0dc-643c-7cdb-3e0d4c5e5999}">
+        <p14:section name="Read-along" id="{bd1515aa-ea0a-7ea9-e5e6-08f5af987820}">
           <p14:sldIdLst>
             <p14:sldId id="261"/>
             <p14:sldId id="262"/>
           </p14:sldIdLst>
         </p14:section>
-        <p14:section name="Teach" id="{0844def1-667e-ff23-eb5f-695e870cc2d9}">
+        <p14:section name="Teach" id="{867a6d2a-1821-b18e-9db8-d5327f89ab8b}">
           <p14:sldIdLst>
             <p14:sldId id="263"/>
             <p14:sldId id="264"/>
@@ -160,7 +160,7 @@
             <p14:sldId id="268"/>
           </p14:sldIdLst>
         </p14:section>
-        <p14:section name="Routes" id="{bf2ec8c1-68f2-ad93-5a04-d3d71f767d2e}">
+        <p14:section name="Routes" id="{b68afa3e-f5d8-95e2-d70b-c7b994cab6ff}">
           <p14:sldIdLst>
             <p14:sldId id="269"/>
             <p14:sldId id="270"/>
@@ -168,12 +168,12 @@
             <p14:sldId id="272"/>
           </p14:sldIdLst>
         </p14:section>
-        <p14:section name="Close" id="{f2746464-1381-466d-48a7-3399ec280dd8}">
+        <p14:section name="Close" id="{c7498fd5-5370-b5b0-4f0b-31fcb1d78b39}">
           <p14:sldIdLst>
             <p14:sldId id="273"/>
           </p14:sldIdLst>
         </p14:section>
-        <p14:section name="Answers" id="{48530ddc-3e8b-1ac9-8e0e-454c48c63eda}">
+        <p14:section name="Answers" id="{4b80752c-418a-ee95-f086-3e0ce30809cc}">
           <p14:sldIdLst>
             <p14:sldId id="274"/>
             <p14:sldId id="275"/>
@@ -1514,7 +1514,7 @@
             <a:r>
               <a:rPr lang="en-US" dirty="0"/>
               <a:t>Answers — task 1: Why graphite conducts. Reveal the answer; pupils mark their own work in a different colour, then read the "why" together. Same destination for every lane, so one answer serves the whole class.
-Answer: A   Each carbon atom has one delocalised electron that is free to move through the structure
+Answer: B   Each carbon atom has one delocalised electron that is free to move through the structure
 Why: One delocalised electron per carbon atom moves through the structure and carries charge.
 Ask a Support pupil to explain one step, and a Stretch pupil to share their extension.</a:t>
             </a:r>
@@ -1606,7 +1606,7 @@
               <a:rPr lang="en-US" dirty="0"/>
               <a:t>Do now — retrieval. Silent, no notes, no help: recall comes before any support. Give about four minutes.
 1. A carbon atom has 4 electrons in its outer shell. In graphite each carbon atom uses 3 of them in covalent bonds. How many electrons per carbon atom are delocalised?  →  1 electron per atom
-2. Which property do diamond and graphite share?  →  A   A very high melting point
+2. Which property do diamond and graphite share?  →  B   A very high melting point
 3. In graphite, the ___ can slide over each other, which makes graphite soft and slippery.  →  layers
 Circulate: who gets 3/3 (Stretch route), 2/3 (Core), 0–1 (Support)? Use this to route pupils later in the lesson.</a:t>
             </a:r>
@@ -1880,7 +1880,7 @@
               <a:rPr lang="en-US" dirty="0"/>
               <a:t>Answers — pupils mark their own in a different colour, then hands up for 3/3, 2/3, 1/3.
 1. 1 electron per atom. 4 outer electrons, 3 used in bonds: 4 − 3 = 1 electron per atom is delocalised. Whole-number counts, so the answer is exact.
-2. A   A very high melting point. Both are giant covalent structures of carbon with many strong covalent bonds to break, so both have very high melting points.
+2. B   A very high melting point. Both are giant covalent structures of carbon with many strong covalent bonds to break, so both have very high melting points.
 3. layers. Graphite's carbon atoms are bonded into flat layers with only weak forces between them, so the layers slide.
 Say the route each score points to: 3/3 Stretch, 2/3 Core, 0–1 Support. Pupils may choose to move up.</a:t>
             </a:r>
@@ -7228,7 +7228,7 @@
                 <a:ea typeface="Calibri" pitchFamily="34" charset="-122"/>
                 <a:cs typeface="Calibri" pitchFamily="34" charset="-120"/>
               </a:rPr>
-              <a:t>Each carbon atom has one delocalised electron that is free to move through the structure</a:t>
+              <a:t>Graphite is made of small molecules that pass electrons along</a:t>
             </a:r>
             <a:endParaRPr lang="en-US" sz="2600" dirty="0"/>
           </a:p>
@@ -7265,7 +7265,7 @@
                 <a:ea typeface="Calibri" pitchFamily="34" charset="-122"/>
                 <a:cs typeface="Calibri" pitchFamily="34" charset="-120"/>
               </a:rPr>
-              <a:t>Graphite contains ions that are free to move</a:t>
+              <a:t>Each carbon atom has one delocalised electron that is free to move through the structure</a:t>
             </a:r>
             <a:endParaRPr lang="en-US" sz="2600" dirty="0"/>
           </a:p>
@@ -7339,7 +7339,7 @@
                 <a:ea typeface="Calibri" pitchFamily="34" charset="-122"/>
                 <a:cs typeface="Calibri" pitchFamily="34" charset="-120"/>
               </a:rPr>
-              <a:t>Graphite is made of small molecules that pass electrons along</a:t>
+              <a:t>Graphite contains ions that are free to move</a:t>
             </a:r>
             <a:endParaRPr lang="en-US" sz="2600" dirty="0"/>
           </a:p>
@@ -11360,7 +11360,7 @@
                 <a:ea typeface="Cambria" pitchFamily="34" charset="-122"/>
                 <a:cs typeface="Cambria" pitchFamily="34" charset="-120"/>
               </a:rPr>
-              <a:t>A   Each carbon atom has one delocalised electron that is free to move through the structure</a:t>
+              <a:t>B   Each carbon atom has one delocalised electron that is free to move through the structure</a:t>
             </a:r>
             <a:endParaRPr lang="en-US" sz="1800" dirty="0"/>
           </a:p>
@@ -12092,7 +12092,7 @@
                 <a:ea typeface="Calibri" pitchFamily="34" charset="-122"/>
                 <a:cs typeface="Calibri" pitchFamily="34" charset="-120"/>
               </a:rPr>
-              <a:t>A very high melting point</a:t>
+              <a:t>They conduct electricity</a:t>
             </a:r>
             <a:endParaRPr lang="en-US" sz="2000" dirty="0"/>
           </a:p>
@@ -12129,7 +12129,7 @@
                 <a:ea typeface="Calibri" pitchFamily="34" charset="-122"/>
                 <a:cs typeface="Calibri" pitchFamily="34" charset="-120"/>
               </a:rPr>
-              <a:t>They conduct electricity</a:t>
+              <a:t>A very high melting point</a:t>
             </a:r>
             <a:endParaRPr lang="en-US" sz="2000" dirty="0"/>
           </a:p>
@@ -12166,7 +12166,7 @@
                 <a:ea typeface="Calibri" pitchFamily="34" charset="-122"/>
                 <a:cs typeface="Calibri" pitchFamily="34" charset="-120"/>
               </a:rPr>
-              <a:t>They are soft and slippery</a:t>
+              <a:t>They are made of small molecules</a:t>
             </a:r>
             <a:endParaRPr lang="en-US" sz="2000" dirty="0"/>
           </a:p>
@@ -12203,7 +12203,7 @@
                 <a:ea typeface="Calibri" pitchFamily="34" charset="-122"/>
                 <a:cs typeface="Calibri" pitchFamily="34" charset="-120"/>
               </a:rPr>
-              <a:t>They are made of small molecules</a:t>
+              <a:t>They are soft and slippery</a:t>
             </a:r>
             <a:endParaRPr lang="en-US" sz="2000" dirty="0"/>
           </a:p>
@@ -14061,7 +14061,7 @@
                 <a:ea typeface="Calibri" pitchFamily="34" charset="-122"/>
                 <a:cs typeface="Calibri" pitchFamily="34" charset="-120"/>
               </a:rPr>
-              <a:t>A   A very high melting point</a:t>
+              <a:t>B   A very high melting point</a:t>
             </a:r>
             <a:endParaRPr lang="en-US" sz="2200" dirty="0"/>
           </a:p>

--- a/decks/combined-bonding/combined-bonding_ch5_giant-covalent.pptx
+++ b/decks/combined-bonding/combined-bonding_ch5_giant-covalent.pptx
@@ -127,30 +127,30 @@
   <p:extLst>
     <p:ext uri="{521415D9-36F7-43E2-AB2F-B90AF26B5E84}">
       <p14:sectionLst xmlns:p14="http://schemas.microsoft.com/office/powerpoint/2010/main">
-        <p14:section name="Opening" id="{98a2a0d4-74ac-9606-6683-18ea76794c1e}">
+        <p14:section name="Opening" id="{b831c9d8-c525-9259-3d55-0ede1a9d5e18}">
           <p14:sldIdLst>
             <p14:sldId id="256"/>
           </p14:sldIdLst>
         </p14:section>
-        <p14:section name="Gate" id="{76c87dab-a963-bd0b-88f9-6405cefabd4c}">
+        <p14:section name="Gate" id="{be3eac07-9cab-b42d-b713-1994885f4b7a}">
           <p14:sldIdLst>
             <p14:sldId id="257"/>
             <p14:sldId id="258"/>
           </p14:sldIdLst>
         </p14:section>
-        <p14:section name="Pre-teach" id="{c9c30e26-6db2-fe86-8626-b3f0eb18b70d}">
+        <p14:section name="Pre-teach" id="{def9cfd2-b3b6-2876-97bd-5d3af096b0cc}">
           <p14:sldIdLst>
             <p14:sldId id="259"/>
             <p14:sldId id="260"/>
           </p14:sldIdLst>
         </p14:section>
-        <p14:section name="Read-along" id="{bd1515aa-ea0a-7ea9-e5e6-08f5af987820}">
+        <p14:section name="Read-along" id="{ad0cfe7e-dd65-f69e-211a-fce2b55a7c58}">
           <p14:sldIdLst>
             <p14:sldId id="261"/>
             <p14:sldId id="262"/>
           </p14:sldIdLst>
         </p14:section>
-        <p14:section name="Teach" id="{867a6d2a-1821-b18e-9db8-d5327f89ab8b}">
+        <p14:section name="Teach" id="{daada920-5952-895e-08cd-463760b83bd2}">
           <p14:sldIdLst>
             <p14:sldId id="263"/>
             <p14:sldId id="264"/>
@@ -160,7 +160,7 @@
             <p14:sldId id="268"/>
           </p14:sldIdLst>
         </p14:section>
-        <p14:section name="Routes" id="{b68afa3e-f5d8-95e2-d70b-c7b994cab6ff}">
+        <p14:section name="Routes" id="{09e39355-8ce2-05c0-49c1-0d0f5a58e74b}">
           <p14:sldIdLst>
             <p14:sldId id="269"/>
             <p14:sldId id="270"/>
@@ -168,12 +168,12 @@
             <p14:sldId id="272"/>
           </p14:sldIdLst>
         </p14:section>
-        <p14:section name="Close" id="{c7498fd5-5370-b5b0-4f0b-31fcb1d78b39}">
+        <p14:section name="Close" id="{58427400-4f5f-23ce-b2ff-6d0655eaf6d8}">
           <p14:sldIdLst>
             <p14:sldId id="273"/>
           </p14:sldIdLst>
         </p14:section>
-        <p14:section name="Answers" id="{4b80752c-418a-ee95-f086-3e0ce30809cc}">
+        <p14:section name="Answers" id="{e42a1461-6584-3932-a0ed-40884e485de4}">
           <p14:sldIdLst>
             <p14:sldId id="274"/>
             <p14:sldId id="275"/>
